--- a/LocalNodeRed/LAB_Node-Red.pptx
+++ b/LocalNodeRed/LAB_Node-Red.pptx
@@ -21404,7 +21404,7 @@
         </p:blipFill>
         <p:spPr bwMode="auto">
           <a:xfrm>
-            <a:off x="1447800" y="4343400"/>
+            <a:off x="1445338" y="4611005"/>
             <a:ext cx="6011024" cy="2514600"/>
           </a:xfrm>
           <a:prstGeom prst="rect">
